--- a/Presentation/AI-Powered Student Risk & Employability Predictor.pptx1.pptx
+++ b/Presentation/AI-Powered Student Risk & Employability Predictor.pptx1.pptx
@@ -5,7 +5,7 @@
     <p:sldMasterId id="2147483648" r:id="rId4"/>
   </p:sldMasterIdLst>
   <p:notesMasterIdLst>
-    <p:notesMasterId r:id="rId22"/>
+    <p:notesMasterId r:id="rId23"/>
   </p:notesMasterIdLst>
   <p:sldIdLst>
     <p:sldId id="256" r:id="rId5"/>
@@ -24,7 +24,8 @@
     <p:sldId id="286" r:id="rId18"/>
     <p:sldId id="289" r:id="rId19"/>
     <p:sldId id="288" r:id="rId20"/>
-    <p:sldId id="282" r:id="rId21"/>
+    <p:sldId id="298" r:id="rId21"/>
+    <p:sldId id="282" r:id="rId22"/>
   </p:sldIdLst>
   <p:sldSz cx="12192000" cy="6858000"/>
   <p:notesSz cx="6858000" cy="9144000"/>
@@ -144,6 +145,7 @@
             <p14:sldId id="286"/>
             <p14:sldId id="289"/>
             <p14:sldId id="288"/>
+            <p14:sldId id="298"/>
             <p14:sldId id="282"/>
           </p14:sldIdLst>
         </p14:section>
@@ -24949,7 +24951,7 @@
           <a:p>
             <a:fld id="{DF61EA0F-A667-4B49-8422-0062BC55E249}" type="slidenum">
               <a:rPr lang="en-US" smtClean="0"/>
-              <a:t>17</a:t>
+              <a:t>18</a:t>
             </a:fld>
             <a:endParaRPr lang="en-US"/>
           </a:p>
@@ -29103,6 +29105,167 @@
       </p:grpSpPr>
       <p:sp>
         <p:nvSpPr>
+          <p:cNvPr id="2" name="Rectangle 1">
+            <a:extLst>
+              <a:ext uri="{FF2B5EF4-FFF2-40B4-BE49-F238E27FC236}">
+                <a16:creationId xmlns:a16="http://schemas.microsoft.com/office/drawing/2014/main" id="{D256DEBD-CC7B-4BCA-978C-218DDEFF3A3C}"/>
+              </a:ext>
+            </a:extLst>
+          </p:cNvPr>
+          <p:cNvSpPr/>
+          <p:nvPr/>
+        </p:nvSpPr>
+        <p:spPr>
+          <a:xfrm>
+            <a:off x="2648089" y="389235"/>
+            <a:ext cx="6032229" cy="707886"/>
+          </a:xfrm>
+          <a:prstGeom prst="rect">
+            <a:avLst/>
+          </a:prstGeom>
+          <a:noFill/>
+        </p:spPr>
+        <p:txBody>
+          <a:bodyPr wrap="none" lIns="91440" tIns="45720" rIns="91440" bIns="45720">
+            <a:spAutoFit/>
+          </a:bodyPr>
+          <a:lstStyle/>
+          <a:p>
+            <a:pPr algn="ctr"/>
+            <a:r>
+              <a:rPr lang="en-US" sz="4000" b="1" cap="none" spc="0" dirty="0">
+                <a:ln w="9525">
+                  <a:solidFill>
+                    <a:schemeClr val="bg1"/>
+                  </a:solidFill>
+                  <a:prstDash val="solid"/>
+                </a:ln>
+                <a:solidFill>
+                  <a:schemeClr val="tx1"/>
+                </a:solidFill>
+                <a:effectLst>
+                  <a:outerShdw blurRad="12700" dist="38100" dir="2700000" algn="tl" rotWithShape="0">
+                    <a:schemeClr val="bg1">
+                      <a:lumMod val="50000"/>
+                    </a:schemeClr>
+                  </a:outerShdw>
+                </a:effectLst>
+              </a:rPr>
+              <a:t>Questions and Feedback</a:t>
+            </a:r>
+          </a:p>
+        </p:txBody>
+      </p:sp>
+      <p:pic>
+        <p:nvPicPr>
+          <p:cNvPr id="10" name="Graphic 9" descr="Zoom in">
+            <a:extLst>
+              <a:ext uri="{FF2B5EF4-FFF2-40B4-BE49-F238E27FC236}">
+                <a16:creationId xmlns:a16="http://schemas.microsoft.com/office/drawing/2014/main" id="{A57F2CD9-9649-435D-9E1D-5F4434F36C87}"/>
+              </a:ext>
+            </a:extLst>
+          </p:cNvPr>
+          <p:cNvPicPr>
+            <a:picLocks noChangeAspect="1"/>
+          </p:cNvPicPr>
+          <p:nvPr/>
+        </p:nvPicPr>
+        <p:blipFill>
+          <a:blip r:embed="rId2">
+            <a:extLst>
+              <a:ext uri="{28A0092B-C50C-407E-A947-70E740481C1C}">
+                <a14:useLocalDpi xmlns:a14="http://schemas.microsoft.com/office/drawing/2010/main" val="0"/>
+              </a:ext>
+              <a:ext uri="{96DAC541-7B7A-43D3-8B79-37D633B846F1}">
+                <asvg:svgBlip xmlns:asvg="http://schemas.microsoft.com/office/drawing/2016/SVG/main" r:embed="rId3"/>
+              </a:ext>
+            </a:extLst>
+          </a:blip>
+          <a:stretch>
+            <a:fillRect/>
+          </a:stretch>
+        </p:blipFill>
+        <p:spPr>
+          <a:xfrm>
+            <a:off x="2648087" y="2603500"/>
+            <a:ext cx="1396999" cy="1396999"/>
+          </a:xfrm>
+          <a:prstGeom prst="rect">
+            <a:avLst/>
+          </a:prstGeom>
+        </p:spPr>
+      </p:pic>
+      <p:pic>
+        <p:nvPicPr>
+          <p:cNvPr id="12" name="Graphic 11" descr="Repeat">
+            <a:extLst>
+              <a:ext uri="{FF2B5EF4-FFF2-40B4-BE49-F238E27FC236}">
+                <a16:creationId xmlns:a16="http://schemas.microsoft.com/office/drawing/2014/main" id="{502C6553-A49B-45BB-A9B7-80491F1A0A1E}"/>
+              </a:ext>
+            </a:extLst>
+          </p:cNvPr>
+          <p:cNvPicPr>
+            <a:picLocks noChangeAspect="1"/>
+          </p:cNvPicPr>
+          <p:nvPr/>
+        </p:nvPicPr>
+        <p:blipFill>
+          <a:blip r:embed="rId4">
+            <a:extLst>
+              <a:ext uri="{28A0092B-C50C-407E-A947-70E740481C1C}">
+                <a14:useLocalDpi xmlns:a14="http://schemas.microsoft.com/office/drawing/2010/main" val="0"/>
+              </a:ext>
+              <a:ext uri="{96DAC541-7B7A-43D3-8B79-37D633B846F1}">
+                <asvg:svgBlip xmlns:asvg="http://schemas.microsoft.com/office/drawing/2016/SVG/main" r:embed="rId5"/>
+              </a:ext>
+            </a:extLst>
+          </a:blip>
+          <a:stretch>
+            <a:fillRect/>
+          </a:stretch>
+        </p:blipFill>
+        <p:spPr>
+          <a:xfrm>
+            <a:off x="7315200" y="2603500"/>
+            <a:ext cx="1397000" cy="1397000"/>
+          </a:xfrm>
+          <a:prstGeom prst="rect">
+            <a:avLst/>
+          </a:prstGeom>
+        </p:spPr>
+      </p:pic>
+    </p:spTree>
+    <p:extLst>
+      <p:ext uri="{BB962C8B-B14F-4D97-AF65-F5344CB8AC3E}">
+        <p14:creationId xmlns:p14="http://schemas.microsoft.com/office/powerpoint/2010/main" val="2292796028"/>
+      </p:ext>
+    </p:extLst>
+  </p:cSld>
+  <p:clrMapOvr>
+    <a:masterClrMapping/>
+  </p:clrMapOvr>
+</p:sld>
+</file>
+
+<file path=ppt/slides/slide18.xml><?xml version="1.0" encoding="utf-8"?>
+<p:sld xmlns:a="http://schemas.openxmlformats.org/drawingml/2006/main" xmlns:r="http://schemas.openxmlformats.org/officeDocument/2006/relationships" xmlns:p="http://schemas.openxmlformats.org/presentationml/2006/main">
+  <p:cSld>
+    <p:spTree>
+      <p:nvGrpSpPr>
+        <p:cNvPr id="1" name=""/>
+        <p:cNvGrpSpPr/>
+        <p:nvPr/>
+      </p:nvGrpSpPr>
+      <p:grpSpPr>
+        <a:xfrm>
+          <a:off x="0" y="0"/>
+          <a:ext cx="0" cy="0"/>
+          <a:chOff x="0" y="0"/>
+          <a:chExt cx="0" cy="0"/>
+        </a:xfrm>
+      </p:grpSpPr>
+      <p:sp>
+        <p:nvSpPr>
           <p:cNvPr id="10" name="Title 9"/>
           <p:cNvSpPr>
             <a:spLocks noGrp="1"/>
@@ -29245,8 +29408,8 @@
         </p:nvSpPr>
         <p:spPr>
           <a:xfrm>
-            <a:off x="3534466" y="2913142"/>
-            <a:ext cx="6774068" cy="2977733"/>
+            <a:off x="3238500" y="2527300"/>
+            <a:ext cx="3708400" cy="2667000"/>
           </a:xfrm>
           <a:prstGeom prst="rect">
             <a:avLst/>
@@ -29317,6 +29480,27 @@
             </a:r>
           </a:p>
           <a:p>
+            <a:pPr marL="0" indent="0" algn="l">
+              <a:lnSpc>
+                <a:spcPts val="1800"/>
+              </a:lnSpc>
+              <a:spcAft>
+                <a:spcPts val="600"/>
+              </a:spcAft>
+              <a:buNone/>
+            </a:pPr>
+            <a:endParaRPr lang="en-US" sz="1400" b="1" dirty="0">
+              <a:solidFill>
+                <a:prstClr val="black">
+                  <a:lumMod val="75000"/>
+                  <a:lumOff val="25000"/>
+                </a:prstClr>
+              </a:solidFill>
+              <a:latin typeface="Segoe UI" panose="020B0502040204020203" pitchFamily="34" charset="0"/>
+              <a:cs typeface="Segoe UI" panose="020B0502040204020203" pitchFamily="34" charset="0"/>
+            </a:endParaRPr>
+          </a:p>
+          <a:p>
             <a:pPr>
               <a:lnSpc>
                 <a:spcPts val="1800"/>
@@ -29327,7 +29511,7 @@
             </a:pPr>
             <a:r>
               <a:rPr lang="en-GB" dirty="0"/>
-              <a:t>angela.wachira@student.moringaschool.com</a:t>
+              <a:t>angelawachira64@gmail.com</a:t>
             </a:r>
             <a:endParaRPr lang="en-US" sz="1400" b="1" dirty="0">
               <a:solidFill>
@@ -29363,6 +29547,27 @@
               </a:rPr>
               <a:t>+254 795 799763</a:t>
             </a:r>
+          </a:p>
+          <a:p>
+            <a:pPr marL="0" indent="0" algn="l">
+              <a:lnSpc>
+                <a:spcPts val="1800"/>
+              </a:lnSpc>
+              <a:spcAft>
+                <a:spcPts val="600"/>
+              </a:spcAft>
+              <a:buNone/>
+            </a:pPr>
+            <a:endParaRPr lang="en-US" sz="1400" b="1" dirty="0">
+              <a:solidFill>
+                <a:prstClr val="black">
+                  <a:lumMod val="75000"/>
+                  <a:lumOff val="25000"/>
+                </a:prstClr>
+              </a:solidFill>
+              <a:latin typeface="Segoe UI" panose="020B0502040204020203" pitchFamily="34" charset="0"/>
+              <a:cs typeface="Segoe UI" panose="020B0502040204020203" pitchFamily="34" charset="0"/>
+            </a:endParaRPr>
           </a:p>
           <a:p>
             <a:pPr marL="0" indent="0" algn="l">
@@ -29433,124 +29638,6 @@
               </a:spcAft>
               <a:buNone/>
             </a:pPr>
-            <a:r>
-              <a:rPr lang="en-US" sz="1400" b="1" dirty="0">
-                <a:solidFill>
-                  <a:prstClr val="black">
-                    <a:lumMod val="75000"/>
-                    <a:lumOff val="25000"/>
-                  </a:prstClr>
-                </a:solidFill>
-                <a:latin typeface="Segoe UI" panose="020B0502040204020203" pitchFamily="34" charset="0"/>
-                <a:cs typeface="Segoe UI" panose="020B0502040204020203" pitchFamily="34" charset="0"/>
-                <a:hlinkClick r:id="rId5"/>
-              </a:rPr>
-              <a:t>mercy@gmail.com</a:t>
-            </a:r>
-            <a:endParaRPr lang="en-US" sz="1400" b="1" dirty="0">
-              <a:solidFill>
-                <a:prstClr val="black">
-                  <a:lumMod val="75000"/>
-                  <a:lumOff val="25000"/>
-                </a:prstClr>
-              </a:solidFill>
-              <a:latin typeface="Segoe UI" panose="020B0502040204020203" pitchFamily="34" charset="0"/>
-              <a:cs typeface="Segoe UI" panose="020B0502040204020203" pitchFamily="34" charset="0"/>
-            </a:endParaRPr>
-          </a:p>
-          <a:p>
-            <a:pPr marL="0" indent="0" algn="l">
-              <a:lnSpc>
-                <a:spcPts val="1800"/>
-              </a:lnSpc>
-              <a:spcAft>
-                <a:spcPts val="600"/>
-              </a:spcAft>
-              <a:buNone/>
-            </a:pPr>
-            <a:r>
-              <a:rPr lang="en-US" sz="1400" b="1" dirty="0">
-                <a:solidFill>
-                  <a:prstClr val="black">
-                    <a:lumMod val="75000"/>
-                    <a:lumOff val="25000"/>
-                  </a:prstClr>
-                </a:solidFill>
-                <a:latin typeface="Segoe UI" panose="020B0502040204020203" pitchFamily="34" charset="0"/>
-                <a:cs typeface="Segoe UI" panose="020B0502040204020203" pitchFamily="34" charset="0"/>
-              </a:rPr>
-              <a:t>+254 716 177610</a:t>
-            </a:r>
-          </a:p>
-          <a:p>
-            <a:pPr marL="0" indent="0" algn="l">
-              <a:lnSpc>
-                <a:spcPts val="1800"/>
-              </a:lnSpc>
-              <a:spcAft>
-                <a:spcPts val="600"/>
-              </a:spcAft>
-              <a:buNone/>
-            </a:pPr>
-            <a:r>
-              <a:rPr lang="en-US" sz="1400" b="1" dirty="0">
-                <a:solidFill>
-                  <a:prstClr val="black">
-                    <a:lumMod val="75000"/>
-                    <a:lumOff val="25000"/>
-                  </a:prstClr>
-                </a:solidFill>
-                <a:latin typeface="Segoe UI" panose="020B0502040204020203" pitchFamily="34" charset="0"/>
-                <a:cs typeface="Segoe UI" panose="020B0502040204020203" pitchFamily="34" charset="0"/>
-                <a:hlinkClick r:id="rId6"/>
-              </a:rPr>
-              <a:t>ted@gmail.com</a:t>
-            </a:r>
-            <a:endParaRPr lang="en-US" sz="1400" b="1" dirty="0">
-              <a:solidFill>
-                <a:prstClr val="black">
-                  <a:lumMod val="75000"/>
-                  <a:lumOff val="25000"/>
-                </a:prstClr>
-              </a:solidFill>
-              <a:latin typeface="Segoe UI" panose="020B0502040204020203" pitchFamily="34" charset="0"/>
-              <a:cs typeface="Segoe UI" panose="020B0502040204020203" pitchFamily="34" charset="0"/>
-            </a:endParaRPr>
-          </a:p>
-          <a:p>
-            <a:pPr marL="0" indent="0" algn="l">
-              <a:lnSpc>
-                <a:spcPts val="1800"/>
-              </a:lnSpc>
-              <a:spcAft>
-                <a:spcPts val="600"/>
-              </a:spcAft>
-              <a:buNone/>
-            </a:pPr>
-            <a:r>
-              <a:rPr lang="en-US" sz="1400" b="1" dirty="0">
-                <a:solidFill>
-                  <a:prstClr val="black">
-                    <a:lumMod val="75000"/>
-                    <a:lumOff val="25000"/>
-                  </a:prstClr>
-                </a:solidFill>
-                <a:latin typeface="Segoe UI" panose="020B0502040204020203" pitchFamily="34" charset="0"/>
-                <a:cs typeface="Segoe UI" panose="020B0502040204020203" pitchFamily="34" charset="0"/>
-              </a:rPr>
-              <a:t>+254 790 465883</a:t>
-            </a:r>
-          </a:p>
-          <a:p>
-            <a:pPr marL="0" indent="0" algn="l">
-              <a:lnSpc>
-                <a:spcPts val="1800"/>
-              </a:lnSpc>
-              <a:spcAft>
-                <a:spcPts val="600"/>
-              </a:spcAft>
-              <a:buNone/>
-            </a:pPr>
             <a:endParaRPr lang="en-GB" sz="1200" dirty="0">
               <a:solidFill>
                 <a:prstClr val="black">
@@ -29579,13 +29666,13 @@
           <p:nvPr/>
         </p:nvPicPr>
         <p:blipFill>
-          <a:blip r:embed="rId7">
+          <a:blip r:embed="rId5">
             <a:extLst>
               <a:ext uri="{28A0092B-C50C-407E-A947-70E740481C1C}">
                 <a14:useLocalDpi xmlns:a14="http://schemas.microsoft.com/office/drawing/2010/main" val="0"/>
               </a:ext>
               <a:ext uri="{96DAC541-7B7A-43D3-8B79-37D633B846F1}">
-                <asvg:svgBlip xmlns:asvg="http://schemas.microsoft.com/office/drawing/2016/SVG/main" r:embed="rId8"/>
+                <asvg:svgBlip xmlns:asvg="http://schemas.microsoft.com/office/drawing/2016/SVG/main" r:embed="rId6"/>
               </a:ext>
             </a:extLst>
           </a:blip>
@@ -29603,6 +29690,226 @@
           </a:prstGeom>
         </p:spPr>
       </p:pic>
+      <p:sp>
+        <p:nvSpPr>
+          <p:cNvPr id="16" name="TextBox 15">
+            <a:extLst>
+              <a:ext uri="{FF2B5EF4-FFF2-40B4-BE49-F238E27FC236}">
+                <a16:creationId xmlns:a16="http://schemas.microsoft.com/office/drawing/2014/main" id="{E0C9722F-DBEA-478B-91E3-9557A7F96F32}"/>
+              </a:ext>
+            </a:extLst>
+          </p:cNvPr>
+          <p:cNvSpPr txBox="1"/>
+          <p:nvPr/>
+        </p:nvSpPr>
+        <p:spPr>
+          <a:xfrm>
+            <a:off x="8597900" y="2305677"/>
+            <a:ext cx="2336800" cy="2064166"/>
+          </a:xfrm>
+          <a:prstGeom prst="rect">
+            <a:avLst/>
+          </a:prstGeom>
+        </p:spPr>
+        <p:txBody>
+          <a:bodyPr vert="horz" wrap="none" lIns="91440" tIns="45720" rIns="91440" bIns="45720" rtlCol="0">
+            <a:noAutofit/>
+          </a:bodyPr>
+          <a:lstStyle/>
+          <a:p>
+            <a:pPr>
+              <a:lnSpc>
+                <a:spcPts val="1800"/>
+              </a:lnSpc>
+              <a:spcAft>
+                <a:spcPts val="600"/>
+              </a:spcAft>
+            </a:pPr>
+            <a:endParaRPr lang="en-US" sz="1200" b="1" dirty="0">
+              <a:solidFill>
+                <a:prstClr val="black">
+                  <a:lumMod val="75000"/>
+                  <a:lumOff val="25000"/>
+                </a:prstClr>
+              </a:solidFill>
+              <a:latin typeface="Segoe UI" panose="020B0502040204020203" pitchFamily="34" charset="0"/>
+              <a:cs typeface="Segoe UI" panose="020B0502040204020203" pitchFamily="34" charset="0"/>
+            </a:endParaRPr>
+          </a:p>
+          <a:p>
+            <a:pPr>
+              <a:lnSpc>
+                <a:spcPts val="1800"/>
+              </a:lnSpc>
+              <a:spcAft>
+                <a:spcPts val="600"/>
+              </a:spcAft>
+            </a:pPr>
+            <a:r>
+              <a:rPr lang="en-US" sz="1400" b="1" dirty="0">
+                <a:solidFill>
+                  <a:prstClr val="black">
+                    <a:lumMod val="75000"/>
+                    <a:lumOff val="25000"/>
+                  </a:prstClr>
+                </a:solidFill>
+                <a:latin typeface="Segoe UI" panose="020B0502040204020203" pitchFamily="34" charset="0"/>
+                <a:cs typeface="Segoe UI" panose="020B0502040204020203" pitchFamily="34" charset="0"/>
+                <a:hlinkClick r:id="rId7"/>
+              </a:rPr>
+              <a:t>mercy@gmail.com</a:t>
+            </a:r>
+            <a:endParaRPr lang="en-US" sz="1400" b="1" dirty="0">
+              <a:solidFill>
+                <a:prstClr val="black">
+                  <a:lumMod val="75000"/>
+                  <a:lumOff val="25000"/>
+                </a:prstClr>
+              </a:solidFill>
+              <a:latin typeface="Segoe UI" panose="020B0502040204020203" pitchFamily="34" charset="0"/>
+              <a:cs typeface="Segoe UI" panose="020B0502040204020203" pitchFamily="34" charset="0"/>
+            </a:endParaRPr>
+          </a:p>
+          <a:p>
+            <a:pPr>
+              <a:lnSpc>
+                <a:spcPts val="1800"/>
+              </a:lnSpc>
+              <a:spcAft>
+                <a:spcPts val="600"/>
+              </a:spcAft>
+            </a:pPr>
+            <a:r>
+              <a:rPr lang="en-US" sz="1400" b="1" dirty="0">
+                <a:solidFill>
+                  <a:prstClr val="black">
+                    <a:lumMod val="75000"/>
+                    <a:lumOff val="25000"/>
+                  </a:prstClr>
+                </a:solidFill>
+                <a:latin typeface="Segoe UI" panose="020B0502040204020203" pitchFamily="34" charset="0"/>
+                <a:cs typeface="Segoe UI" panose="020B0502040204020203" pitchFamily="34" charset="0"/>
+              </a:rPr>
+              <a:t>+254 716 177610</a:t>
+            </a:r>
+          </a:p>
+          <a:p>
+            <a:pPr>
+              <a:lnSpc>
+                <a:spcPts val="1800"/>
+              </a:lnSpc>
+              <a:spcAft>
+                <a:spcPts val="600"/>
+              </a:spcAft>
+            </a:pPr>
+            <a:endParaRPr lang="en-US" sz="1400" b="1" dirty="0">
+              <a:solidFill>
+                <a:prstClr val="black">
+                  <a:lumMod val="75000"/>
+                  <a:lumOff val="25000"/>
+                </a:prstClr>
+              </a:solidFill>
+              <a:latin typeface="Segoe UI" panose="020B0502040204020203" pitchFamily="34" charset="0"/>
+              <a:cs typeface="Segoe UI" panose="020B0502040204020203" pitchFamily="34" charset="0"/>
+            </a:endParaRPr>
+          </a:p>
+          <a:p>
+            <a:pPr>
+              <a:lnSpc>
+                <a:spcPts val="1800"/>
+              </a:lnSpc>
+              <a:spcAft>
+                <a:spcPts val="600"/>
+              </a:spcAft>
+            </a:pPr>
+            <a:r>
+              <a:rPr lang="en-US" sz="1400" b="1" dirty="0">
+                <a:solidFill>
+                  <a:prstClr val="black">
+                    <a:lumMod val="75000"/>
+                    <a:lumOff val="25000"/>
+                  </a:prstClr>
+                </a:solidFill>
+                <a:latin typeface="Segoe UI" panose="020B0502040204020203" pitchFamily="34" charset="0"/>
+                <a:cs typeface="Segoe UI" panose="020B0502040204020203" pitchFamily="34" charset="0"/>
+              </a:rPr>
+              <a:t>Mutumat25@gmail.com</a:t>
+            </a:r>
+          </a:p>
+          <a:p>
+            <a:pPr>
+              <a:lnSpc>
+                <a:spcPts val="1800"/>
+              </a:lnSpc>
+              <a:spcAft>
+                <a:spcPts val="600"/>
+              </a:spcAft>
+            </a:pPr>
+            <a:r>
+              <a:rPr lang="en-US" sz="1400" b="1" dirty="0">
+                <a:solidFill>
+                  <a:prstClr val="black">
+                    <a:lumMod val="75000"/>
+                    <a:lumOff val="25000"/>
+                  </a:prstClr>
+                </a:solidFill>
+                <a:latin typeface="Segoe UI" panose="020B0502040204020203" pitchFamily="34" charset="0"/>
+                <a:cs typeface="Segoe UI" panose="020B0502040204020203" pitchFamily="34" charset="0"/>
+              </a:rPr>
+              <a:t>+254 790 465883</a:t>
+            </a:r>
+          </a:p>
+        </p:txBody>
+      </p:sp>
+      <p:sp>
+        <p:nvSpPr>
+          <p:cNvPr id="17" name="TextBox 16">
+            <a:extLst>
+              <a:ext uri="{FF2B5EF4-FFF2-40B4-BE49-F238E27FC236}">
+                <a16:creationId xmlns:a16="http://schemas.microsoft.com/office/drawing/2014/main" id="{80D5E3AD-C8F8-472B-ABFA-897E4524A962}"/>
+              </a:ext>
+            </a:extLst>
+          </p:cNvPr>
+          <p:cNvSpPr txBox="1"/>
+          <p:nvPr/>
+        </p:nvSpPr>
+        <p:spPr>
+          <a:xfrm>
+            <a:off x="9017000" y="2672934"/>
+            <a:ext cx="914400" cy="914400"/>
+          </a:xfrm>
+          <a:prstGeom prst="rect">
+            <a:avLst/>
+          </a:prstGeom>
+        </p:spPr>
+        <p:txBody>
+          <a:bodyPr vert="horz" wrap="none" lIns="91440" tIns="45720" rIns="91440" bIns="45720" rtlCol="0">
+            <a:noAutofit/>
+          </a:bodyPr>
+          <a:lstStyle/>
+          <a:p>
+            <a:pPr marL="0" indent="0" algn="l">
+              <a:lnSpc>
+                <a:spcPts val="1800"/>
+              </a:lnSpc>
+              <a:spcAft>
+                <a:spcPts val="600"/>
+              </a:spcAft>
+              <a:buNone/>
+            </a:pPr>
+            <a:endParaRPr lang="en-GB" sz="1200" dirty="0">
+              <a:solidFill>
+                <a:prstClr val="black">
+                  <a:lumMod val="75000"/>
+                  <a:lumOff val="25000"/>
+                </a:prstClr>
+              </a:solidFill>
+              <a:latin typeface="Segoe UI" panose="020B0502040204020203" pitchFamily="34" charset="0"/>
+              <a:cs typeface="Segoe UI" panose="020B0502040204020203" pitchFamily="34" charset="0"/>
+            </a:endParaRPr>
+          </a:p>
+        </p:txBody>
+      </p:sp>
     </p:spTree>
     <p:extLst>
       <p:ext uri="{BB962C8B-B14F-4D97-AF65-F5344CB8AC3E}">
